--- a/docs/submission/FloodFact-AI-Demonstration.pptx
+++ b/docs/submission/FloodFact-AI-Demonstration.pptx
@@ -7811,12 +7811,12 @@
         </p:nvSpPr>
         <p:spPr>
           <a:xfrm>
-            <a:off x="4492411" y="1728216"/>
-            <a:ext cx="3204130" cy="4270248"/>
+            <a:off x="4706913" y="1728216"/>
+            <a:ext cx="2775126" cy="4270248"/>
           </a:xfrm>
           <a:prstGeom prst="roundRect">
             <a:avLst>
-              <a:gd name="adj" fmla="val 1427"/>
+              <a:gd name="adj" fmla="val 1647"/>
             </a:avLst>
           </a:prstGeom>
           <a:solidFill>
@@ -7846,8 +7846,8 @@
         </p:blipFill>
         <p:spPr>
           <a:xfrm>
-            <a:off x="4547275" y="1783080"/>
-            <a:ext cx="3094402" cy="4160520"/>
+            <a:off x="4761777" y="1783080"/>
+            <a:ext cx="2665398" cy="4160520"/>
           </a:xfrm>
           <a:prstGeom prst="rect">
             <a:avLst/>
@@ -8092,8 +8092,8 @@
         </p:nvSpPr>
         <p:spPr>
           <a:xfrm>
-            <a:off x="3064492" y="1728216"/>
-            <a:ext cx="6059969" cy="4270248"/>
+            <a:off x="3286010" y="1728216"/>
+            <a:ext cx="5616931" cy="4270248"/>
           </a:xfrm>
           <a:prstGeom prst="roundRect">
             <a:avLst>
@@ -8127,8 +8127,8 @@
         </p:blipFill>
         <p:spPr>
           <a:xfrm>
-            <a:off x="3119356" y="1783080"/>
-            <a:ext cx="5950241" cy="4160520"/>
+            <a:off x="3340874" y="1783080"/>
+            <a:ext cx="5507203" cy="4160520"/>
           </a:xfrm>
           <a:prstGeom prst="rect">
             <a:avLst/>
@@ -10155,8 +10155,8 @@
         </p:nvSpPr>
         <p:spPr>
           <a:xfrm>
-            <a:off x="2470265" y="1728216"/>
-            <a:ext cx="7248422" cy="4270248"/>
+            <a:off x="2608255" y="1728216"/>
+            <a:ext cx="6972441" cy="4270248"/>
           </a:xfrm>
           <a:prstGeom prst="roundRect">
             <a:avLst>
@@ -10190,8 +10190,8 @@
         </p:blipFill>
         <p:spPr>
           <a:xfrm>
-            <a:off x="2525129" y="1783080"/>
-            <a:ext cx="7138694" cy="4160520"/>
+            <a:off x="2663119" y="1783080"/>
+            <a:ext cx="6862713" cy="4160520"/>
           </a:xfrm>
           <a:prstGeom prst="rect">
             <a:avLst/>

--- a/docs/submission/FloodFact-AI-Demonstration.pptx
+++ b/docs/submission/FloodFact-AI-Demonstration.pptx
@@ -7811,12 +7811,12 @@
         </p:nvSpPr>
         <p:spPr>
           <a:xfrm>
-            <a:off x="4706913" y="1728216"/>
-            <a:ext cx="2775126" cy="4270248"/>
+            <a:off x="4724682" y="1728216"/>
+            <a:ext cx="2739588" cy="4270248"/>
           </a:xfrm>
           <a:prstGeom prst="roundRect">
             <a:avLst>
-              <a:gd name="adj" fmla="val 1647"/>
+              <a:gd name="adj" fmla="val 1669"/>
             </a:avLst>
           </a:prstGeom>
           <a:solidFill>
@@ -7846,8 +7846,8 @@
         </p:blipFill>
         <p:spPr>
           <a:xfrm>
-            <a:off x="4761777" y="1783080"/>
-            <a:ext cx="2665398" cy="4160520"/>
+            <a:off x="4779546" y="1783080"/>
+            <a:ext cx="2629860" cy="4160520"/>
           </a:xfrm>
           <a:prstGeom prst="rect">
             <a:avLst/>
@@ -8092,8 +8092,8 @@
         </p:nvSpPr>
         <p:spPr>
           <a:xfrm>
-            <a:off x="3286010" y="1728216"/>
-            <a:ext cx="5616931" cy="4270248"/>
+            <a:off x="3268818" y="1728216"/>
+            <a:ext cx="5651316" cy="4270248"/>
           </a:xfrm>
           <a:prstGeom prst="roundRect">
             <a:avLst>
@@ -8127,8 +8127,8 @@
         </p:blipFill>
         <p:spPr>
           <a:xfrm>
-            <a:off x="3340874" y="1783080"/>
-            <a:ext cx="5507203" cy="4160520"/>
+            <a:off x="3323682" y="1783080"/>
+            <a:ext cx="5541588" cy="4160520"/>
           </a:xfrm>
           <a:prstGeom prst="rect">
             <a:avLst/>
@@ -10155,8 +10155,8 @@
         </p:nvSpPr>
         <p:spPr>
           <a:xfrm>
-            <a:off x="2608255" y="1728216"/>
-            <a:ext cx="6972441" cy="4270248"/>
+            <a:off x="2581517" y="1728216"/>
+            <a:ext cx="7025917" cy="4270248"/>
           </a:xfrm>
           <a:prstGeom prst="roundRect">
             <a:avLst>
@@ -10190,8 +10190,8 @@
         </p:blipFill>
         <p:spPr>
           <a:xfrm>
-            <a:off x="2663119" y="1783080"/>
-            <a:ext cx="6862713" cy="4160520"/>
+            <a:off x="2636381" y="1783080"/>
+            <a:ext cx="6916189" cy="4160520"/>
           </a:xfrm>
           <a:prstGeom prst="rect">
             <a:avLst/>

--- a/docs/submission/FloodFact-AI-Demonstration.pptx
+++ b/docs/submission/FloodFact-AI-Demonstration.pptx
@@ -23,9 +23,11 @@
     <p:sldId id="271" r:id="rId17"/>
     <p:sldId id="272" r:id="rId18"/>
     <p:sldId id="273" r:id="rId19"/>
+    <p:sldId id="274" r:id="rId20"/>
+    <p:sldId id="275" r:id="rId21"/>
   </p:sldIdLst>
   <p:notesMasterIdLst>
-    <p:notesMasterId r:id="rId20"/>
+    <p:notesMasterId r:id="rId22"/>
   </p:notesMasterIdLst>
   <p:sldSz cx="12192000" cy="6858000"/>
   <p:notesSz cx="6858000" cy="12192000"/>
@@ -1353,6 +1355,94 @@
 </p:notes>
 </file>
 
+<file path=ppt/notesSlides/notesSlide19.xml><?xml version="1.0" encoding="utf-8"?>
+<p:notes xmlns:a="http://schemas.openxmlformats.org/drawingml/2006/main" xmlns:r="http://schemas.openxmlformats.org/officeDocument/2006/relationships" xmlns:p="http://schemas.openxmlformats.org/presentationml/2006/main">
+  <p:cSld>
+    <p:spTree>
+      <p:nvGrpSpPr>
+        <p:cNvPr id="1" name=""/>
+        <p:cNvGrpSpPr/>
+        <p:nvPr/>
+      </p:nvGrpSpPr>
+      <p:grpSpPr>
+        <a:xfrm>
+          <a:off x="0" y="0"/>
+          <a:ext cx="0" cy="0"/>
+          <a:chOff x="0" y="0"/>
+          <a:chExt cx="0" cy="0"/>
+        </a:xfrm>
+      </p:grpSpPr>
+      <p:sp>
+        <p:nvSpPr>
+          <p:cNvPr id="2" name="Slide Image Placeholder 1"/>
+          <p:cNvSpPr>
+            <a:spLocks noGrp="1" noRot="1" noChangeAspect="1"/>
+          </p:cNvSpPr>
+          <p:nvPr>
+            <p:ph type="sldImg"/>
+          </p:nvPr>
+        </p:nvSpPr>
+        <p:spPr/>
+      </p:sp>
+      <p:sp>
+        <p:nvSpPr>
+          <p:cNvPr id="3" name="Notes Placeholder 2"/>
+          <p:cNvSpPr>
+            <a:spLocks noGrp="1"/>
+          </p:cNvSpPr>
+          <p:nvPr>
+            <p:ph type="body" idx="1"/>
+          </p:nvPr>
+        </p:nvSpPr>
+        <p:spPr/>
+        <p:txBody>
+          <a:bodyPr/>
+          <a:lstStyle/>
+          <a:p>
+            <a:r>
+              <a:rPr lang="en-US" dirty="0"/>
+              <a:t/>
+            </a:r>
+            <a:endParaRPr lang="en-US" dirty="0"/>
+          </a:p>
+        </p:txBody>
+      </p:sp>
+      <p:sp>
+        <p:nvSpPr>
+          <p:cNvPr id="4" name="Slide Number Placeholder 3"/>
+          <p:cNvSpPr>
+            <a:spLocks noGrp="1"/>
+          </p:cNvSpPr>
+          <p:nvPr>
+            <p:ph type="sldNum" sz="quarter" idx="10"/>
+          </p:nvPr>
+        </p:nvSpPr>
+        <p:spPr/>
+        <p:txBody>
+          <a:bodyPr/>
+          <a:lstStyle/>
+          <a:p>
+            <a:fld id="{F7021451-1387-4CA6-816F-3879F97B5CBC}" type="slidenum">
+              <a:rPr lang="en-US"/>
+              <a:t>19</a:t>
+            </a:fld>
+            <a:endParaRPr lang="en-US"/>
+          </a:p>
+        </p:txBody>
+      </p:sp>
+    </p:spTree>
+    <p:extLst>
+      <p:ext uri="{BB962C8B-B14F-4D97-AF65-F5344CB8AC3E}">
+        <p14:creationId xmlns:p14="http://schemas.microsoft.com/office/powerpoint/2010/main" val="1024086991"/>
+      </p:ext>
+    </p:extLst>
+  </p:cSld>
+  <p:clrMapOvr>
+    <a:masterClrMapping/>
+  </p:clrMapOvr>
+</p:notes>
+</file>
+
 <file path=ppt/notesSlides/notesSlide2.xml><?xml version="1.0" encoding="utf-8"?>
 <p:notes xmlns:a="http://schemas.openxmlformats.org/drawingml/2006/main" xmlns:r="http://schemas.openxmlformats.org/officeDocument/2006/relationships" xmlns:p="http://schemas.openxmlformats.org/presentationml/2006/main">
   <p:cSld>
@@ -1423,6 +1513,94 @@
             <a:fld id="{F7021451-1387-4CA6-816F-3879F97B5CBC}" type="slidenum">
               <a:rPr lang="en-US"/>
               <a:t>2</a:t>
+            </a:fld>
+            <a:endParaRPr lang="en-US"/>
+          </a:p>
+        </p:txBody>
+      </p:sp>
+    </p:spTree>
+    <p:extLst>
+      <p:ext uri="{BB962C8B-B14F-4D97-AF65-F5344CB8AC3E}">
+        <p14:creationId xmlns:p14="http://schemas.microsoft.com/office/powerpoint/2010/main" val="1024086991"/>
+      </p:ext>
+    </p:extLst>
+  </p:cSld>
+  <p:clrMapOvr>
+    <a:masterClrMapping/>
+  </p:clrMapOvr>
+</p:notes>
+</file>
+
+<file path=ppt/notesSlides/notesSlide20.xml><?xml version="1.0" encoding="utf-8"?>
+<p:notes xmlns:a="http://schemas.openxmlformats.org/drawingml/2006/main" xmlns:r="http://schemas.openxmlformats.org/officeDocument/2006/relationships" xmlns:p="http://schemas.openxmlformats.org/presentationml/2006/main">
+  <p:cSld>
+    <p:spTree>
+      <p:nvGrpSpPr>
+        <p:cNvPr id="1" name=""/>
+        <p:cNvGrpSpPr/>
+        <p:nvPr/>
+      </p:nvGrpSpPr>
+      <p:grpSpPr>
+        <a:xfrm>
+          <a:off x="0" y="0"/>
+          <a:ext cx="0" cy="0"/>
+          <a:chOff x="0" y="0"/>
+          <a:chExt cx="0" cy="0"/>
+        </a:xfrm>
+      </p:grpSpPr>
+      <p:sp>
+        <p:nvSpPr>
+          <p:cNvPr id="2" name="Slide Image Placeholder 1"/>
+          <p:cNvSpPr>
+            <a:spLocks noGrp="1" noRot="1" noChangeAspect="1"/>
+          </p:cNvSpPr>
+          <p:nvPr>
+            <p:ph type="sldImg"/>
+          </p:nvPr>
+        </p:nvSpPr>
+        <p:spPr/>
+      </p:sp>
+      <p:sp>
+        <p:nvSpPr>
+          <p:cNvPr id="3" name="Notes Placeholder 2"/>
+          <p:cNvSpPr>
+            <a:spLocks noGrp="1"/>
+          </p:cNvSpPr>
+          <p:nvPr>
+            <p:ph type="body" idx="1"/>
+          </p:nvPr>
+        </p:nvSpPr>
+        <p:spPr/>
+        <p:txBody>
+          <a:bodyPr/>
+          <a:lstStyle/>
+          <a:p>
+            <a:r>
+              <a:rPr lang="en-US" dirty="0"/>
+              <a:t/>
+            </a:r>
+            <a:endParaRPr lang="en-US" dirty="0"/>
+          </a:p>
+        </p:txBody>
+      </p:sp>
+      <p:sp>
+        <p:nvSpPr>
+          <p:cNvPr id="4" name="Slide Number Placeholder 3"/>
+          <p:cNvSpPr>
+            <a:spLocks noGrp="1"/>
+          </p:cNvSpPr>
+          <p:nvPr>
+            <p:ph type="sldNum" sz="quarter" idx="10"/>
+          </p:nvPr>
+        </p:nvSpPr>
+        <p:spPr/>
+        <p:txBody>
+          <a:bodyPr/>
+          <a:lstStyle/>
+          <a:p>
+            <a:fld id="{F7021451-1387-4CA6-816F-3879F97B5CBC}" type="slidenum">
+              <a:rPr lang="en-US"/>
+              <a:t>20</a:t>
             </a:fld>
             <a:endParaRPr lang="en-US"/>
           </a:p>
@@ -2596,7 +2774,7 @@
                 <a:ea typeface="Calibri" pitchFamily="34" charset="-122"/>
                 <a:cs typeface="Calibri" pitchFamily="34" charset="-120"/>
               </a:rPr>
-              <a:t>MISSION CONTROL</a:t>
+              <a:t>NOT JUST A PRODUCT</a:t>
             </a:r>
             <a:endParaRPr lang="en-US" sz="1250" dirty="0"/>
           </a:p>
@@ -2638,7 +2816,7 @@
                 <a:ea typeface="Calibri" pitchFamily="34" charset="-122"/>
                 <a:cs typeface="Calibri" pitchFamily="34" charset="-120"/>
               </a:rPr>
-              <a:t>Every pilot area, one live map</a:t>
+              <a:t>A real blog — the engineering rationale, not marketing copy</a:t>
             </a:r>
             <a:endParaRPr lang="en-US" sz="2700" dirty="0"/>
           </a:p>
@@ -2652,12 +2830,12 @@
         </p:nvSpPr>
         <p:spPr>
           <a:xfrm>
-            <a:off x="2341372" y="1728216"/>
-            <a:ext cx="7506208" cy="4270248"/>
+            <a:off x="4159151" y="1728216"/>
+            <a:ext cx="3870650" cy="4270248"/>
           </a:xfrm>
           <a:prstGeom prst="roundRect">
             <a:avLst>
-              <a:gd name="adj" fmla="val 1071"/>
+              <a:gd name="adj" fmla="val 1181"/>
             </a:avLst>
           </a:prstGeom>
           <a:solidFill>
@@ -2673,7 +2851,7 @@
       </p:sp>
       <p:pic>
         <p:nvPicPr>
-          <p:cNvPr id="5" name="Image 0" descr="/home/user/FloodfactAI/docs/submission/screenshots/06-admin-overview.png">    </p:cNvPr>
+          <p:cNvPr id="5" name="Image 0" descr="/home/user/FloodfactAI/docs/submission/screenshots/13-blog-index.png">    </p:cNvPr>
           <p:cNvPicPr>
             <a:picLocks noChangeAspect="1"/>
           </p:cNvPicPr>
@@ -2687,8 +2865,8 @@
         </p:blipFill>
         <p:spPr>
           <a:xfrm>
-            <a:off x="2396236" y="1783080"/>
-            <a:ext cx="7396480" cy="4160520"/>
+            <a:off x="4214015" y="1783080"/>
+            <a:ext cx="3760922" cy="4160520"/>
           </a:xfrm>
           <a:prstGeom prst="rect">
             <a:avLst/>
@@ -2728,7 +2906,7 @@
                 <a:ea typeface="Calibri" pitchFamily="34" charset="-122"/>
                 <a:cs typeface="Calibri" pitchFamily="34" charset="-120"/>
               </a:rPr>
-              <a:t>Mukuru's three wards, colored by latest verdict — falls back to a status list if tiles don't load.</a:t>
+              <a:t>Six posts on how the pipeline works, why the AI doesn't decide, and general flood-safety guidance — no fabricated pilot results.</a:t>
             </a:r>
             <a:endParaRPr lang="en-US" sz="1300" dirty="0"/>
           </a:p>
@@ -2877,7 +3055,7 @@
                 <a:ea typeface="Calibri" pitchFamily="34" charset="-122"/>
                 <a:cs typeface="Calibri" pitchFamily="34" charset="-120"/>
               </a:rPr>
-              <a:t>THE SAFETY NET</a:t>
+              <a:t>MISSION CONTROL</a:t>
             </a:r>
             <a:endParaRPr lang="en-US" sz="1250" dirty="0"/>
           </a:p>
@@ -2919,7 +3097,7 @@
                 <a:ea typeface="Calibri" pitchFamily="34" charset="-122"/>
                 <a:cs typeface="Calibri" pitchFamily="34" charset="-120"/>
               </a:rPr>
-              <a:t>When evidence is insufficient, a human decides — never an algorithm alone</a:t>
+              <a:t>Every pilot area, one live map</a:t>
             </a:r>
             <a:endParaRPr lang="en-US" sz="2700" dirty="0"/>
           </a:p>
@@ -2954,7 +3132,7 @@
       </p:sp>
       <p:pic>
         <p:nvPicPr>
-          <p:cNvPr id="5" name="Image 0" descr="/home/user/FloodfactAI/docs/submission/screenshots/07-admin-escalations.png">    </p:cNvPr>
+          <p:cNvPr id="5" name="Image 0" descr="/home/user/FloodfactAI/docs/submission/screenshots/06-admin-overview.png">    </p:cNvPr>
           <p:cNvPicPr>
             <a:picLocks noChangeAspect="1"/>
           </p:cNvPicPr>
@@ -3009,7 +3187,7 @@
                 <a:ea typeface="Calibri" pitchFamily="34" charset="-122"/>
                 <a:cs typeface="Calibri" pitchFamily="34" charset="-120"/>
               </a:rPr>
-              <a:t>insufficient_evidence can never silently become “False Information” — it lands here for a human call.</a:t>
+              <a:t>Mukuru's three wards, colored by latest verdict — falls back to a status list if tiles don't load.</a:t>
             </a:r>
             <a:endParaRPr lang="en-US" sz="1300" dirty="0"/>
           </a:p>
@@ -3158,7 +3336,7 @@
                 <a:ea typeface="Calibri" pitchFamily="34" charset="-122"/>
                 <a:cs typeface="Calibri" pitchFamily="34" charset="-120"/>
               </a:rPr>
-              <a:t>PROOF, NOT PROMISES</a:t>
+              <a:t>REAL GEOGRAPHY, NOT PINS</a:t>
             </a:r>
             <a:endParaRPr lang="en-US" sz="1250" dirty="0"/>
           </a:p>
@@ -3200,7 +3378,7 @@
                 <a:ea typeface="Calibri" pitchFamily="34" charset="-122"/>
                 <a:cs typeface="Calibri" pitchFamily="34" charset="-120"/>
               </a:rPr>
-              <a:t>Pilot metrics computed from real database rows, not typed into a slide</a:t>
+              <a:t>Pilot boundaries, reference wards, and historical incidents — one map</a:t>
             </a:r>
             <a:endParaRPr lang="en-US" sz="2700" dirty="0"/>
           </a:p>
@@ -3214,8 +3392,8 @@
         </p:nvSpPr>
         <p:spPr>
           <a:xfrm>
-            <a:off x="2567992" y="1728216"/>
-            <a:ext cx="7052969" cy="4270248"/>
+            <a:off x="2630223" y="1728216"/>
+            <a:ext cx="6928506" cy="4270248"/>
           </a:xfrm>
           <a:prstGeom prst="roundRect">
             <a:avLst>
@@ -3235,7 +3413,7 @@
       </p:sp>
       <p:pic>
         <p:nvPicPr>
-          <p:cNvPr id="5" name="Image 0" descr="/home/user/FloodfactAI/docs/submission/screenshots/08-admin-metrics.png">    </p:cNvPr>
+          <p:cNvPr id="5" name="Image 0" descr="/home/user/FloodfactAI/docs/submission/screenshots/14-admin-map.png">    </p:cNvPr>
           <p:cNvPicPr>
             <a:picLocks noChangeAspect="1"/>
           </p:cNvPicPr>
@@ -3249,8 +3427,8 @@
         </p:blipFill>
         <p:spPr>
           <a:xfrm>
-            <a:off x="2622856" y="1783080"/>
-            <a:ext cx="6943241" cy="4160520"/>
+            <a:off x="2685087" y="1783080"/>
+            <a:ext cx="6818778" cy="4160520"/>
           </a:xfrm>
           <a:prstGeom prst="rect">
             <a:avLst/>
@@ -3290,7 +3468,7 @@
                 <a:ea typeface="Calibri" pitchFamily="34" charset="-122"/>
                 <a:cs typeface="Calibri" pitchFamily="34" charset="-120"/>
               </a:rPr>
-              <a:t>A live SQL view, not hand-typed numbers — recomputed from reports and ambassador observations.</a:t>
+              <a:t>Real polygons from pilot_areas.boundary, plus cited historical floods — including an honestly-labeled illustrative one.</a:t>
             </a:r>
             <a:endParaRPr lang="en-US" sz="1300" dirty="0"/>
           </a:p>
@@ -3439,7 +3617,7 @@
                 <a:ea typeface="Calibri" pitchFamily="34" charset="-122"/>
                 <a:cs typeface="Calibri" pitchFamily="34" charset="-120"/>
               </a:rPr>
-              <a:t>RADICAL TRANSPARENCY</a:t>
+              <a:t>THE SAFETY NET</a:t>
             </a:r>
             <a:endParaRPr lang="en-US" sz="1250" dirty="0"/>
           </a:p>
@@ -3481,7 +3659,7 @@
                 <a:ea typeface="Calibri" pitchFamily="34" charset="-122"/>
                 <a:cs typeface="Calibri" pitchFamily="34" charset="-120"/>
               </a:rPr>
-              <a:t>Every data source's health, live or sandbox, in plain sight</a:t>
+              <a:t>When evidence is insufficient, a human decides — never an algorithm alone</a:t>
             </a:r>
             <a:endParaRPr lang="en-US" sz="2700" dirty="0"/>
           </a:p>
@@ -3495,8 +3673,8 @@
         </p:nvSpPr>
         <p:spPr>
           <a:xfrm>
-            <a:off x="2723631" y="1728216"/>
-            <a:ext cx="6741690" cy="4270248"/>
+            <a:off x="2341372" y="1728216"/>
+            <a:ext cx="7506208" cy="4270248"/>
           </a:xfrm>
           <a:prstGeom prst="roundRect">
             <a:avLst>
@@ -3516,7 +3694,7 @@
       </p:sp>
       <p:pic>
         <p:nvPicPr>
-          <p:cNvPr id="5" name="Image 0" descr="/home/user/FloodfactAI/docs/submission/screenshots/09-admin-sources.png">    </p:cNvPr>
+          <p:cNvPr id="5" name="Image 0" descr="/home/user/FloodfactAI/docs/submission/screenshots/07-admin-escalations.png">    </p:cNvPr>
           <p:cNvPicPr>
             <a:picLocks noChangeAspect="1"/>
           </p:cNvPicPr>
@@ -3530,8 +3708,8 @@
         </p:blipFill>
         <p:spPr>
           <a:xfrm>
-            <a:off x="2778495" y="1783080"/>
-            <a:ext cx="6631962" cy="4160520"/>
+            <a:off x="2396236" y="1783080"/>
+            <a:ext cx="7396480" cy="4160520"/>
           </a:xfrm>
           <a:prstGeom prst="rect">
             <a:avLst/>
@@ -3571,7 +3749,7 @@
                 <a:ea typeface="Calibri" pitchFamily="34" charset="-122"/>
                 <a:cs typeface="Calibri" pitchFamily="34" charset="-120"/>
               </a:rPr>
-              <a:t>Each provider's live/sandbox mode and status, visible to the people operating the system.</a:t>
+              <a:t>insufficient_evidence can never silently become “False Information” — it lands here for a human call.</a:t>
             </a:r>
             <a:endParaRPr lang="en-US" sz="1300" dirty="0"/>
           </a:p>
@@ -3720,7 +3898,7 @@
                 <a:ea typeface="Calibri" pitchFamily="34" charset="-122"/>
                 <a:cs typeface="Calibri" pitchFamily="34" charset="-120"/>
               </a:rPr>
-              <a:t>STEP 6 — THE HUMAN TRUST LAYER</a:t>
+              <a:t>PROOF, NOT PROMISES</a:t>
             </a:r>
             <a:endParaRPr lang="en-US" sz="1250" dirty="0"/>
           </a:p>
@@ -3762,7 +3940,7 @@
                 <a:ea typeface="Calibri" pitchFamily="34" charset="-122"/>
                 <a:cs typeface="Calibri" pitchFamily="34" charset="-120"/>
               </a:rPr>
-              <a:t>Youth ambassadors see only their own ward's queue</a:t>
+              <a:t>Pilot metrics computed from real database rows, not typed into a slide</a:t>
             </a:r>
             <a:endParaRPr lang="en-US" sz="2700" dirty="0"/>
           </a:p>
@@ -3776,8 +3954,8 @@
         </p:nvSpPr>
         <p:spPr>
           <a:xfrm>
-            <a:off x="2341372" y="1728216"/>
-            <a:ext cx="7506208" cy="4270248"/>
+            <a:off x="3933020" y="1728216"/>
+            <a:ext cx="4322913" cy="4270248"/>
           </a:xfrm>
           <a:prstGeom prst="roundRect">
             <a:avLst>
@@ -3797,7 +3975,7 @@
       </p:sp>
       <p:pic>
         <p:nvPicPr>
-          <p:cNvPr id="5" name="Image 0" descr="/home/user/FloodfactAI/docs/submission/screenshots/11-ambassador-queue.png">    </p:cNvPr>
+          <p:cNvPr id="5" name="Image 0" descr="/home/user/FloodfactAI/docs/submission/screenshots/08-admin-metrics.png">    </p:cNvPr>
           <p:cNvPicPr>
             <a:picLocks noChangeAspect="1"/>
           </p:cNvPicPr>
@@ -3811,8 +3989,8 @@
         </p:blipFill>
         <p:spPr>
           <a:xfrm>
-            <a:off x="2396236" y="1783080"/>
-            <a:ext cx="7396480" cy="4160520"/>
+            <a:off x="3987884" y="1783080"/>
+            <a:ext cx="4213185" cy="4160520"/>
           </a:xfrm>
           <a:prstGeom prst="rect">
             <a:avLst/>
@@ -3852,7 +4030,7 @@
                 <a:ea typeface="Calibri" pitchFamily="34" charset="-122"/>
                 <a:cs typeface="Calibri" pitchFamily="34" charset="-120"/>
               </a:rPr>
-              <a:t>Row-level security enforces this at the database — an ambassador's session cannot query another ward.</a:t>
+              <a:t>A live SQL view, not hand-typed numbers — recomputed from reports and ambassador observations.</a:t>
             </a:r>
             <a:endParaRPr lang="en-US" sz="1300" dirty="0"/>
           </a:p>
@@ -4001,7 +4179,7 @@
                 <a:ea typeface="Calibri" pitchFamily="34" charset="-122"/>
                 <a:cs typeface="Calibri" pitchFamily="34" charset="-120"/>
               </a:rPr>
-              <a:t>GROUND-TRUTH FROM THE FIELD</a:t>
+              <a:t>RADICAL TRANSPARENCY</a:t>
             </a:r>
             <a:endParaRPr lang="en-US" sz="1250" dirty="0"/>
           </a:p>
@@ -4043,7 +4221,7 @@
                 <a:ea typeface="Calibri" pitchFamily="34" charset="-122"/>
                 <a:cs typeface="Calibri" pitchFamily="34" charset="-120"/>
               </a:rPr>
-              <a:t>A visual confirmation and a water-level reading feed straight back into the evidence store</a:t>
+              <a:t>Every data source's health, live or sandbox, in plain sight</a:t>
             </a:r>
             <a:endParaRPr lang="en-US" sz="2700" dirty="0"/>
           </a:p>
@@ -4057,8 +4235,8 @@
         </p:nvSpPr>
         <p:spPr>
           <a:xfrm>
-            <a:off x="2341372" y="1728216"/>
-            <a:ext cx="7506208" cy="4270248"/>
+            <a:off x="2723631" y="1728216"/>
+            <a:ext cx="6741690" cy="4270248"/>
           </a:xfrm>
           <a:prstGeom prst="roundRect">
             <a:avLst>
@@ -4078,7 +4256,7 @@
       </p:sp>
       <p:pic>
         <p:nvPicPr>
-          <p:cNvPr id="5" name="Image 0" descr="/home/user/FloodfactAI/docs/submission/screenshots/12-ambassador-case.png">    </p:cNvPr>
+          <p:cNvPr id="5" name="Image 0" descr="/home/user/FloodfactAI/docs/submission/screenshots/09-admin-sources.png">    </p:cNvPr>
           <p:cNvPicPr>
             <a:picLocks noChangeAspect="1"/>
           </p:cNvPicPr>
@@ -4092,8 +4270,8 @@
         </p:blipFill>
         <p:spPr>
           <a:xfrm>
-            <a:off x="2396236" y="1783080"/>
-            <a:ext cx="7396480" cy="4160520"/>
+            <a:off x="2778495" y="1783080"/>
+            <a:ext cx="6631962" cy="4160520"/>
           </a:xfrm>
           <a:prstGeom prst="rect">
             <a:avLst/>
@@ -4133,7 +4311,7 @@
                 <a:ea typeface="Calibri" pitchFamily="34" charset="-122"/>
                 <a:cs typeface="Calibri" pitchFamily="34" charset="-120"/>
               </a:rPr>
-              <a:t>A visual confirmation and a water reading feed back in as evidence for the next nearby report.</a:t>
+              <a:t>Each provider's live/sandbox mode and status, visible to the people operating the system.</a:t>
             </a:r>
             <a:endParaRPr lang="en-US" sz="1300" dirty="0"/>
           </a:p>
@@ -4282,7 +4460,7 @@
                 <a:ea typeface="Calibri" pitchFamily="34" charset="-122"/>
                 <a:cs typeface="Calibri" pitchFamily="34" charset="-120"/>
               </a:rPr>
-              <a:t>EXACTLY WHAT'S REAL TODAY</a:t>
+              <a:t>STEP 6 — THE HUMAN TRUST LAYER</a:t>
             </a:r>
             <a:endParaRPr lang="en-US" sz="1250" dirty="0"/>
           </a:p>
@@ -4324,6 +4502,568 @@
                 <a:ea typeface="Calibri" pitchFamily="34" charset="-122"/>
                 <a:cs typeface="Calibri" pitchFamily="34" charset="-120"/>
               </a:rPr>
+              <a:t>Youth ambassadors see only their own ward's queue</a:t>
+            </a:r>
+            <a:endParaRPr lang="en-US" sz="2700" dirty="0"/>
+          </a:p>
+        </p:txBody>
+      </p:sp>
+      <p:sp>
+        <p:nvSpPr>
+          <p:cNvPr id="4" name="Shape 2"/>
+          <p:cNvSpPr/>
+          <p:nvPr/>
+        </p:nvSpPr>
+        <p:spPr>
+          <a:xfrm>
+            <a:off x="2341372" y="1728216"/>
+            <a:ext cx="7506208" cy="4270248"/>
+          </a:xfrm>
+          <a:prstGeom prst="roundRect">
+            <a:avLst>
+              <a:gd name="adj" fmla="val 1071"/>
+            </a:avLst>
+          </a:prstGeom>
+          <a:solidFill>
+            <a:srgbClr val="FFFFFF"/>
+          </a:solidFill>
+          <a:ln w="12700">
+            <a:solidFill>
+              <a:srgbClr val="E2E5E8"/>
+            </a:solidFill>
+            <a:prstDash val="solid"/>
+          </a:ln>
+        </p:spPr>
+      </p:sp>
+      <p:pic>
+        <p:nvPicPr>
+          <p:cNvPr id="5" name="Image 0" descr="/home/user/FloodfactAI/docs/submission/screenshots/11-ambassador-queue.png">    </p:cNvPr>
+          <p:cNvPicPr>
+            <a:picLocks noChangeAspect="1"/>
+          </p:cNvPicPr>
+          <p:nvPr/>
+        </p:nvPicPr>
+        <p:blipFill>
+          <a:blip r:embed="rId1"/>
+          <a:stretch>
+            <a:fillRect/>
+          </a:stretch>
+        </p:blipFill>
+        <p:spPr>
+          <a:xfrm>
+            <a:off x="2396236" y="1783080"/>
+            <a:ext cx="7396480" cy="4160520"/>
+          </a:xfrm>
+          <a:prstGeom prst="rect">
+            <a:avLst/>
+          </a:prstGeom>
+        </p:spPr>
+      </p:pic>
+      <p:sp>
+        <p:nvSpPr>
+          <p:cNvPr id="6" name="Text 3"/>
+          <p:cNvSpPr/>
+          <p:nvPr/>
+        </p:nvSpPr>
+        <p:spPr>
+          <a:xfrm>
+            <a:off x="548640" y="6126480"/>
+            <a:ext cx="11064240" cy="457200"/>
+          </a:xfrm>
+          <a:prstGeom prst="rect">
+            <a:avLst/>
+          </a:prstGeom>
+          <a:noFill/>
+          <a:ln/>
+        </p:spPr>
+        <p:txBody>
+          <a:bodyPr wrap="square" lIns="0" tIns="0" rIns="0" bIns="0" rtlCol="0" anchor="ctr"/>
+          <a:lstStyle/>
+          <a:p>
+            <a:pPr indent="0" marL="0">
+              <a:buNone/>
+            </a:pPr>
+            <a:r>
+              <a:rPr lang="en-US" sz="1300" i="1" dirty="0">
+                <a:solidFill>
+                  <a:srgbClr val="5B6672"/>
+                </a:solidFill>
+                <a:latin typeface="Calibri" pitchFamily="34" charset="0"/>
+                <a:ea typeface="Calibri" pitchFamily="34" charset="-122"/>
+                <a:cs typeface="Calibri" pitchFamily="34" charset="-120"/>
+              </a:rPr>
+              <a:t>Row-level security enforces this at the database — an ambassador's session cannot query another ward.</a:t>
+            </a:r>
+            <a:endParaRPr lang="en-US" sz="1300" dirty="0"/>
+          </a:p>
+        </p:txBody>
+      </p:sp>
+      <p:sp>
+        <p:nvSpPr>
+          <p:cNvPr id="7" name="Text 4"/>
+          <p:cNvSpPr/>
+          <p:nvPr/>
+        </p:nvSpPr>
+        <p:spPr>
+          <a:xfrm>
+            <a:off x="548640" y="6510528"/>
+            <a:ext cx="7315200" cy="274320"/>
+          </a:xfrm>
+          <a:prstGeom prst="rect">
+            <a:avLst/>
+          </a:prstGeom>
+          <a:noFill/>
+          <a:ln/>
+        </p:spPr>
+        <p:txBody>
+          <a:bodyPr wrap="square" lIns="0" tIns="0" rIns="0" bIns="0" rtlCol="0" anchor="ctr"/>
+          <a:lstStyle/>
+          <a:p>
+            <a:pPr indent="0" marL="0">
+              <a:buNone/>
+            </a:pPr>
+            <a:r>
+              <a:rPr lang="en-US" sz="900" dirty="0">
+                <a:solidFill>
+                  <a:srgbClr val="8A96A3"/>
+                </a:solidFill>
+                <a:latin typeface="Calibri" pitchFamily="34" charset="0"/>
+                <a:ea typeface="Calibri" pitchFamily="34" charset="-122"/>
+                <a:cs typeface="Calibri" pitchFamily="34" charset="-120"/>
+              </a:rPr>
+              <a:t>FloodFact AI  ·  Phase 1 Pilot: Mukuru, Nairobi</a:t>
+            </a:r>
+            <a:endParaRPr lang="en-US" sz="900" dirty="0"/>
+          </a:p>
+        </p:txBody>
+      </p:sp>
+      <p:sp>
+        <p:nvSpPr>
+          <p:cNvPr id="8" name="Text 5"/>
+          <p:cNvSpPr/>
+          <p:nvPr/>
+        </p:nvSpPr>
+        <p:spPr>
+          <a:xfrm>
+            <a:off x="11430000" y="6510528"/>
+            <a:ext cx="457200" cy="274320"/>
+          </a:xfrm>
+          <a:prstGeom prst="rect">
+            <a:avLst/>
+          </a:prstGeom>
+          <a:noFill/>
+          <a:ln/>
+        </p:spPr>
+        <p:txBody>
+          <a:bodyPr wrap="square" lIns="0" tIns="0" rIns="0" bIns="0" rtlCol="0" anchor="ctr"/>
+          <a:lstStyle/>
+          <a:p>
+            <a:pPr algn="r" indent="0" marL="0">
+              <a:buNone/>
+            </a:pPr>
+            <a:r>
+              <a:rPr lang="en-US" sz="900" dirty="0">
+                <a:solidFill>
+                  <a:srgbClr val="8A96A3"/>
+                </a:solidFill>
+                <a:latin typeface="Calibri" pitchFamily="34" charset="0"/>
+                <a:ea typeface="Calibri" pitchFamily="34" charset="-122"/>
+                <a:cs typeface="Calibri" pitchFamily="34" charset="-120"/>
+              </a:rPr>
+              <a:t>15</a:t>
+            </a:r>
+            <a:endParaRPr lang="en-US" sz="900" dirty="0"/>
+          </a:p>
+        </p:txBody>
+      </p:sp>
+    </p:spTree>
+  </p:cSld>
+  <p:clrMapOvr>
+    <a:masterClrMapping/>
+  </p:clrMapOvr>
+</p:sld>
+</file>
+
+<file path=ppt/slides/slide17.xml><?xml version="1.0" encoding="utf-8"?>
+<p:sld xmlns:a="http://schemas.openxmlformats.org/drawingml/2006/main" xmlns:r="http://schemas.openxmlformats.org/officeDocument/2006/relationships" xmlns:p="http://schemas.openxmlformats.org/presentationml/2006/main">
+  <p:cSld name="Slide 17">
+    <p:bg>
+      <p:bgPr>
+        <a:solidFill>
+          <a:srgbClr val="FFFFFF"/>
+        </a:solidFill>
+      </p:bgPr>
+    </p:bg>
+    <p:spTree>
+      <p:nvGrpSpPr>
+        <p:cNvPr id="1" name=""/>
+        <p:cNvGrpSpPr/>
+        <p:nvPr/>
+      </p:nvGrpSpPr>
+      <p:grpSpPr>
+        <a:xfrm>
+          <a:off x="0" y="0"/>
+          <a:ext cx="0" cy="0"/>
+          <a:chOff x="0" y="0"/>
+          <a:chExt cx="0" cy="0"/>
+        </a:xfrm>
+      </p:grpSpPr>
+      <p:sp>
+        <p:nvSpPr>
+          <p:cNvPr id="2" name="Text 0"/>
+          <p:cNvSpPr/>
+          <p:nvPr/>
+        </p:nvSpPr>
+        <p:spPr>
+          <a:xfrm>
+            <a:off x="548640" y="384048"/>
+            <a:ext cx="10789920" cy="320040"/>
+          </a:xfrm>
+          <a:prstGeom prst="rect">
+            <a:avLst/>
+          </a:prstGeom>
+          <a:noFill/>
+          <a:ln/>
+        </p:spPr>
+        <p:txBody>
+          <a:bodyPr wrap="square" lIns="0" tIns="0" rIns="0" bIns="0" rtlCol="0" anchor="ctr"/>
+          <a:lstStyle/>
+          <a:p>
+            <a:pPr indent="0" marL="0">
+              <a:buNone/>
+            </a:pPr>
+            <a:r>
+              <a:rPr lang="en-US" sz="1250" b="1" spc="120" kern="0" dirty="0">
+                <a:solidFill>
+                  <a:srgbClr val="0C5A5E"/>
+                </a:solidFill>
+                <a:latin typeface="Calibri" pitchFamily="34" charset="0"/>
+                <a:ea typeface="Calibri" pitchFamily="34" charset="-122"/>
+                <a:cs typeface="Calibri" pitchFamily="34" charset="-120"/>
+              </a:rPr>
+              <a:t>GROUND-TRUTH FROM THE FIELD</a:t>
+            </a:r>
+            <a:endParaRPr lang="en-US" sz="1250" dirty="0"/>
+          </a:p>
+        </p:txBody>
+      </p:sp>
+      <p:sp>
+        <p:nvSpPr>
+          <p:cNvPr id="3" name="Text 1"/>
+          <p:cNvSpPr/>
+          <p:nvPr/>
+        </p:nvSpPr>
+        <p:spPr>
+          <a:xfrm>
+            <a:off x="548640" y="685800"/>
+            <a:ext cx="11064240" cy="868680"/>
+          </a:xfrm>
+          <a:prstGeom prst="rect">
+            <a:avLst/>
+          </a:prstGeom>
+          <a:noFill/>
+          <a:ln/>
+        </p:spPr>
+        <p:txBody>
+          <a:bodyPr wrap="square" lIns="0" tIns="0" rIns="0" bIns="0" rtlCol="0" anchor="ctr"/>
+          <a:lstStyle/>
+          <a:p>
+            <a:pPr indent="0" marL="0">
+              <a:lnSpc>
+                <a:spcPct val="108000"/>
+              </a:lnSpc>
+              <a:buNone/>
+            </a:pPr>
+            <a:r>
+              <a:rPr lang="en-US" sz="2700" b="1" dirty="0">
+                <a:solidFill>
+                  <a:srgbClr val="10151A"/>
+                </a:solidFill>
+                <a:latin typeface="Calibri" pitchFamily="34" charset="0"/>
+                <a:ea typeface="Calibri" pitchFamily="34" charset="-122"/>
+                <a:cs typeface="Calibri" pitchFamily="34" charset="-120"/>
+              </a:rPr>
+              <a:t>A visual confirmation and a water-level reading feed straight back into the evidence store</a:t>
+            </a:r>
+            <a:endParaRPr lang="en-US" sz="2700" dirty="0"/>
+          </a:p>
+        </p:txBody>
+      </p:sp>
+      <p:sp>
+        <p:nvSpPr>
+          <p:cNvPr id="4" name="Shape 2"/>
+          <p:cNvSpPr/>
+          <p:nvPr/>
+        </p:nvSpPr>
+        <p:spPr>
+          <a:xfrm>
+            <a:off x="2341372" y="1728216"/>
+            <a:ext cx="7506208" cy="4270248"/>
+          </a:xfrm>
+          <a:prstGeom prst="roundRect">
+            <a:avLst>
+              <a:gd name="adj" fmla="val 1071"/>
+            </a:avLst>
+          </a:prstGeom>
+          <a:solidFill>
+            <a:srgbClr val="FFFFFF"/>
+          </a:solidFill>
+          <a:ln w="12700">
+            <a:solidFill>
+              <a:srgbClr val="E2E5E8"/>
+            </a:solidFill>
+            <a:prstDash val="solid"/>
+          </a:ln>
+        </p:spPr>
+      </p:sp>
+      <p:pic>
+        <p:nvPicPr>
+          <p:cNvPr id="5" name="Image 0" descr="/home/user/FloodfactAI/docs/submission/screenshots/12-ambassador-case.png">    </p:cNvPr>
+          <p:cNvPicPr>
+            <a:picLocks noChangeAspect="1"/>
+          </p:cNvPicPr>
+          <p:nvPr/>
+        </p:nvPicPr>
+        <p:blipFill>
+          <a:blip r:embed="rId1"/>
+          <a:stretch>
+            <a:fillRect/>
+          </a:stretch>
+        </p:blipFill>
+        <p:spPr>
+          <a:xfrm>
+            <a:off x="2396236" y="1783080"/>
+            <a:ext cx="7396480" cy="4160520"/>
+          </a:xfrm>
+          <a:prstGeom prst="rect">
+            <a:avLst/>
+          </a:prstGeom>
+        </p:spPr>
+      </p:pic>
+      <p:sp>
+        <p:nvSpPr>
+          <p:cNvPr id="6" name="Text 3"/>
+          <p:cNvSpPr/>
+          <p:nvPr/>
+        </p:nvSpPr>
+        <p:spPr>
+          <a:xfrm>
+            <a:off x="548640" y="6126480"/>
+            <a:ext cx="11064240" cy="457200"/>
+          </a:xfrm>
+          <a:prstGeom prst="rect">
+            <a:avLst/>
+          </a:prstGeom>
+          <a:noFill/>
+          <a:ln/>
+        </p:spPr>
+        <p:txBody>
+          <a:bodyPr wrap="square" lIns="0" tIns="0" rIns="0" bIns="0" rtlCol="0" anchor="ctr"/>
+          <a:lstStyle/>
+          <a:p>
+            <a:pPr indent="0" marL="0">
+              <a:buNone/>
+            </a:pPr>
+            <a:r>
+              <a:rPr lang="en-US" sz="1300" i="1" dirty="0">
+                <a:solidFill>
+                  <a:srgbClr val="5B6672"/>
+                </a:solidFill>
+                <a:latin typeface="Calibri" pitchFamily="34" charset="0"/>
+                <a:ea typeface="Calibri" pitchFamily="34" charset="-122"/>
+                <a:cs typeface="Calibri" pitchFamily="34" charset="-120"/>
+              </a:rPr>
+              <a:t>A visual confirmation and a water reading feed back in as evidence for the next nearby report.</a:t>
+            </a:r>
+            <a:endParaRPr lang="en-US" sz="1300" dirty="0"/>
+          </a:p>
+        </p:txBody>
+      </p:sp>
+      <p:sp>
+        <p:nvSpPr>
+          <p:cNvPr id="7" name="Text 4"/>
+          <p:cNvSpPr/>
+          <p:nvPr/>
+        </p:nvSpPr>
+        <p:spPr>
+          <a:xfrm>
+            <a:off x="548640" y="6510528"/>
+            <a:ext cx="7315200" cy="274320"/>
+          </a:xfrm>
+          <a:prstGeom prst="rect">
+            <a:avLst/>
+          </a:prstGeom>
+          <a:noFill/>
+          <a:ln/>
+        </p:spPr>
+        <p:txBody>
+          <a:bodyPr wrap="square" lIns="0" tIns="0" rIns="0" bIns="0" rtlCol="0" anchor="ctr"/>
+          <a:lstStyle/>
+          <a:p>
+            <a:pPr indent="0" marL="0">
+              <a:buNone/>
+            </a:pPr>
+            <a:r>
+              <a:rPr lang="en-US" sz="900" dirty="0">
+                <a:solidFill>
+                  <a:srgbClr val="8A96A3"/>
+                </a:solidFill>
+                <a:latin typeface="Calibri" pitchFamily="34" charset="0"/>
+                <a:ea typeface="Calibri" pitchFamily="34" charset="-122"/>
+                <a:cs typeface="Calibri" pitchFamily="34" charset="-120"/>
+              </a:rPr>
+              <a:t>FloodFact AI  ·  Phase 1 Pilot: Mukuru, Nairobi</a:t>
+            </a:r>
+            <a:endParaRPr lang="en-US" sz="900" dirty="0"/>
+          </a:p>
+        </p:txBody>
+      </p:sp>
+      <p:sp>
+        <p:nvSpPr>
+          <p:cNvPr id="8" name="Text 5"/>
+          <p:cNvSpPr/>
+          <p:nvPr/>
+        </p:nvSpPr>
+        <p:spPr>
+          <a:xfrm>
+            <a:off x="11430000" y="6510528"/>
+            <a:ext cx="457200" cy="274320"/>
+          </a:xfrm>
+          <a:prstGeom prst="rect">
+            <a:avLst/>
+          </a:prstGeom>
+          <a:noFill/>
+          <a:ln/>
+        </p:spPr>
+        <p:txBody>
+          <a:bodyPr wrap="square" lIns="0" tIns="0" rIns="0" bIns="0" rtlCol="0" anchor="ctr"/>
+          <a:lstStyle/>
+          <a:p>
+            <a:pPr algn="r" indent="0" marL="0">
+              <a:buNone/>
+            </a:pPr>
+            <a:r>
+              <a:rPr lang="en-US" sz="900" dirty="0">
+                <a:solidFill>
+                  <a:srgbClr val="8A96A3"/>
+                </a:solidFill>
+                <a:latin typeface="Calibri" pitchFamily="34" charset="0"/>
+                <a:ea typeface="Calibri" pitchFamily="34" charset="-122"/>
+                <a:cs typeface="Calibri" pitchFamily="34" charset="-120"/>
+              </a:rPr>
+              <a:t>16</a:t>
+            </a:r>
+            <a:endParaRPr lang="en-US" sz="900" dirty="0"/>
+          </a:p>
+        </p:txBody>
+      </p:sp>
+    </p:spTree>
+  </p:cSld>
+  <p:clrMapOvr>
+    <a:masterClrMapping/>
+  </p:clrMapOvr>
+</p:sld>
+</file>
+
+<file path=ppt/slides/slide18.xml><?xml version="1.0" encoding="utf-8"?>
+<p:sld xmlns:a="http://schemas.openxmlformats.org/drawingml/2006/main" xmlns:r="http://schemas.openxmlformats.org/officeDocument/2006/relationships" xmlns:p="http://schemas.openxmlformats.org/presentationml/2006/main">
+  <p:cSld name="Slide 18">
+    <p:bg>
+      <p:bgPr>
+        <a:solidFill>
+          <a:srgbClr val="FFFFFF"/>
+        </a:solidFill>
+      </p:bgPr>
+    </p:bg>
+    <p:spTree>
+      <p:nvGrpSpPr>
+        <p:cNvPr id="1" name=""/>
+        <p:cNvGrpSpPr/>
+        <p:nvPr/>
+      </p:nvGrpSpPr>
+      <p:grpSpPr>
+        <a:xfrm>
+          <a:off x="0" y="0"/>
+          <a:ext cx="0" cy="0"/>
+          <a:chOff x="0" y="0"/>
+          <a:chExt cx="0" cy="0"/>
+        </a:xfrm>
+      </p:grpSpPr>
+      <p:sp>
+        <p:nvSpPr>
+          <p:cNvPr id="2" name="Text 0"/>
+          <p:cNvSpPr/>
+          <p:nvPr/>
+        </p:nvSpPr>
+        <p:spPr>
+          <a:xfrm>
+            <a:off x="548640" y="384048"/>
+            <a:ext cx="10789920" cy="320040"/>
+          </a:xfrm>
+          <a:prstGeom prst="rect">
+            <a:avLst/>
+          </a:prstGeom>
+          <a:noFill/>
+          <a:ln/>
+        </p:spPr>
+        <p:txBody>
+          <a:bodyPr wrap="square" lIns="0" tIns="0" rIns="0" bIns="0" rtlCol="0" anchor="ctr"/>
+          <a:lstStyle/>
+          <a:p>
+            <a:pPr indent="0" marL="0">
+              <a:buNone/>
+            </a:pPr>
+            <a:r>
+              <a:rPr lang="en-US" sz="1250" b="1" spc="120" kern="0" dirty="0">
+                <a:solidFill>
+                  <a:srgbClr val="0C5A5E"/>
+                </a:solidFill>
+                <a:latin typeface="Calibri" pitchFamily="34" charset="0"/>
+                <a:ea typeface="Calibri" pitchFamily="34" charset="-122"/>
+                <a:cs typeface="Calibri" pitchFamily="34" charset="-120"/>
+              </a:rPr>
+              <a:t>EXACTLY WHAT'S REAL TODAY</a:t>
+            </a:r>
+            <a:endParaRPr lang="en-US" sz="1250" dirty="0"/>
+          </a:p>
+        </p:txBody>
+      </p:sp>
+      <p:sp>
+        <p:nvSpPr>
+          <p:cNvPr id="3" name="Text 1"/>
+          <p:cNvSpPr/>
+          <p:nvPr/>
+        </p:nvSpPr>
+        <p:spPr>
+          <a:xfrm>
+            <a:off x="548640" y="685800"/>
+            <a:ext cx="11064240" cy="868680"/>
+          </a:xfrm>
+          <a:prstGeom prst="rect">
+            <a:avLst/>
+          </a:prstGeom>
+          <a:noFill/>
+          <a:ln/>
+        </p:spPr>
+        <p:txBody>
+          <a:bodyPr wrap="square" lIns="0" tIns="0" rIns="0" bIns="0" rtlCol="0" anchor="ctr"/>
+          <a:lstStyle/>
+          <a:p>
+            <a:pPr indent="0" marL="0">
+              <a:lnSpc>
+                <a:spcPct val="108000"/>
+              </a:lnSpc>
+              <a:buNone/>
+            </a:pPr>
+            <a:r>
+              <a:rPr lang="en-US" sz="2700" b="1" dirty="0">
+                <a:solidFill>
+                  <a:srgbClr val="10151A"/>
+                </a:solidFill>
+                <a:latin typeface="Calibri" pitchFamily="34" charset="0"/>
+                <a:ea typeface="Calibri" pitchFamily="34" charset="-122"/>
+                <a:cs typeface="Calibri" pitchFamily="34" charset="-120"/>
+              </a:rPr>
               <a:t>Every integration switches independently — no code changes either way</a:t>
             </a:r>
             <a:endParaRPr lang="en-US" sz="2700" dirty="0"/>
@@ -4332,7 +5072,7 @@
       </p:sp>
       <p:graphicFrame>
         <p:nvGraphicFramePr>
-          <p:cNvPr id="17" name="Table 0"/>
+          <p:cNvPr id="19" name="Table 0"/>
           <p:cNvGraphicFramePr>
             <a:graphicFrameLocks noGrp="1"/>
           </p:cNvGraphicFramePr>
@@ -6120,7 +6860,7 @@
                 <a:ea typeface="Calibri" pitchFamily="34" charset="-122"/>
                 <a:cs typeface="Calibri" pitchFamily="34" charset="-120"/>
               </a:rPr>
-              <a:t>15</a:t>
+              <a:t>17</a:t>
             </a:r>
             <a:endParaRPr lang="en-US" sz="900" dirty="0"/>
           </a:p>
@@ -6134,9 +6874,9 @@
 </p:sld>
 </file>
 
-<file path=ppt/slides/slide17.xml><?xml version="1.0" encoding="utf-8"?>
+<file path=ppt/slides/slide19.xml><?xml version="1.0" encoding="utf-8"?>
 <p:sld xmlns:a="http://schemas.openxmlformats.org/drawingml/2006/main" xmlns:r="http://schemas.openxmlformats.org/officeDocument/2006/relationships" xmlns:p="http://schemas.openxmlformats.org/presentationml/2006/main">
-  <p:cSld name="Slide 17">
+  <p:cSld name="Slide 19">
     <p:bg>
       <p:bgPr>
         <a:solidFill>
@@ -6635,260 +7375,7 @@
                 <a:ea typeface="Calibri" pitchFamily="34" charset="-122"/>
                 <a:cs typeface="Calibri" pitchFamily="34" charset="-120"/>
               </a:rPr>
-              <a:t>16</a:t>
-            </a:r>
-            <a:endParaRPr lang="en-US" sz="900" dirty="0"/>
-          </a:p>
-        </p:txBody>
-      </p:sp>
-    </p:spTree>
-  </p:cSld>
-  <p:clrMapOvr>
-    <a:masterClrMapping/>
-  </p:clrMapOvr>
-</p:sld>
-</file>
-
-<file path=ppt/slides/slide18.xml><?xml version="1.0" encoding="utf-8"?>
-<p:sld xmlns:a="http://schemas.openxmlformats.org/drawingml/2006/main" xmlns:r="http://schemas.openxmlformats.org/officeDocument/2006/relationships" xmlns:p="http://schemas.openxmlformats.org/presentationml/2006/main">
-  <p:cSld name="Slide 18">
-    <p:bg>
-      <p:bgPr>
-        <a:solidFill>
-          <a:srgbClr val="0A0D10"/>
-        </a:solidFill>
-      </p:bgPr>
-    </p:bg>
-    <p:spTree>
-      <p:nvGrpSpPr>
-        <p:cNvPr id="1" name=""/>
-        <p:cNvGrpSpPr/>
-        <p:nvPr/>
-      </p:nvGrpSpPr>
-      <p:grpSpPr>
-        <a:xfrm>
-          <a:off x="0" y="0"/>
-          <a:ext cx="0" cy="0"/>
-          <a:chOff x="0" y="0"/>
-          <a:chExt cx="0" cy="0"/>
-        </a:xfrm>
-      </p:grpSpPr>
-      <p:sp>
-        <p:nvSpPr>
-          <p:cNvPr id="2" name="Text 0"/>
-          <p:cNvSpPr/>
-          <p:nvPr/>
-        </p:nvSpPr>
-        <p:spPr>
-          <a:xfrm>
-            <a:off x="822960" y="1463040"/>
-            <a:ext cx="9144000" cy="365760"/>
-          </a:xfrm>
-          <a:prstGeom prst="rect">
-            <a:avLst/>
-          </a:prstGeom>
-          <a:noFill/>
-          <a:ln/>
-        </p:spPr>
-        <p:txBody>
-          <a:bodyPr wrap="square" lIns="0" tIns="0" rIns="0" bIns="0" rtlCol="0" anchor="ctr"/>
-          <a:lstStyle/>
-          <a:p>
-            <a:pPr indent="0" marL="0">
-              <a:buNone/>
-            </a:pPr>
-            <a:r>
-              <a:rPr lang="en-US" sz="1300" b="1" spc="120" kern="0" dirty="0">
-                <a:solidFill>
-                  <a:srgbClr val="3FB8AE"/>
-                </a:solidFill>
-                <a:latin typeface="Calibri" pitchFamily="34" charset="0"/>
-                <a:ea typeface="Calibri" pitchFamily="34" charset="-122"/>
-                <a:cs typeface="Calibri" pitchFamily="34" charset="-120"/>
-              </a:rPr>
-              <a:t>THANK YOU</a:t>
-            </a:r>
-            <a:endParaRPr lang="en-US" sz="1300" dirty="0"/>
-          </a:p>
-        </p:txBody>
-      </p:sp>
-      <p:sp>
-        <p:nvSpPr>
-          <p:cNvPr id="3" name="Text 1"/>
-          <p:cNvSpPr/>
-          <p:nvPr/>
-        </p:nvSpPr>
-        <p:spPr>
-          <a:xfrm>
-            <a:off x="822960" y="1874520"/>
-            <a:ext cx="10332720" cy="2377440"/>
-          </a:xfrm>
-          <a:prstGeom prst="rect">
-            <a:avLst/>
-          </a:prstGeom>
-          <a:noFill/>
-          <a:ln/>
-        </p:spPr>
-        <p:txBody>
-          <a:bodyPr wrap="square" lIns="0" tIns="0" rIns="0" bIns="0" rtlCol="0" anchor="ctr"/>
-          <a:lstStyle/>
-          <a:p>
-            <a:pPr indent="0" marL="0">
-              <a:lnSpc>
-                <a:spcPct val="115000"/>
-              </a:lnSpc>
-              <a:buNone/>
-            </a:pPr>
-            <a:r>
-              <a:rPr lang="en-US" sz="3400" b="1" dirty="0">
-                <a:solidFill>
-                  <a:srgbClr val="FFFFFF"/>
-                </a:solidFill>
-                <a:latin typeface="Calibri" pitchFamily="34" charset="0"/>
-                <a:ea typeface="Calibri" pitchFamily="34" charset="-122"/>
-                <a:cs typeface="Calibri" pitchFamily="34" charset="-120"/>
-              </a:rPr>
-              <a:t>This is not a concept.</a:t>
-            </a:r>
-            <a:endParaRPr lang="en-US" sz="3400" dirty="0"/>
-          </a:p>
-          <a:p>
-            <a:pPr indent="0" marL="0">
-              <a:lnSpc>
-                <a:spcPct val="115000"/>
-              </a:lnSpc>
-              <a:buNone/>
-            </a:pPr>
-            <a:r>
-              <a:rPr lang="en-US" sz="3400" b="1" dirty="0">
-                <a:solidFill>
-                  <a:srgbClr val="FFFFFF"/>
-                </a:solidFill>
-                <a:latin typeface="Calibri" pitchFamily="34" charset="0"/>
-                <a:ea typeface="Calibri" pitchFamily="34" charset="-122"/>
-                <a:cs typeface="Calibri" pitchFamily="34" charset="-120"/>
-              </a:rPr>
-              <a:t>It's a working system, waiting on real credentials.</a:t>
-            </a:r>
-            <a:endParaRPr lang="en-US" sz="3400" dirty="0"/>
-          </a:p>
-        </p:txBody>
-      </p:sp>
-      <p:sp>
-        <p:nvSpPr>
-          <p:cNvPr id="4" name="Text 2"/>
-          <p:cNvSpPr/>
-          <p:nvPr/>
-        </p:nvSpPr>
-        <p:spPr>
-          <a:xfrm>
-            <a:off x="822960" y="4160520"/>
-            <a:ext cx="9601200" cy="914400"/>
-          </a:xfrm>
-          <a:prstGeom prst="rect">
-            <a:avLst/>
-          </a:prstGeom>
-          <a:noFill/>
-          <a:ln/>
-        </p:spPr>
-        <p:txBody>
-          <a:bodyPr wrap="square" lIns="0" tIns="0" rIns="0" bIns="0" rtlCol="0" anchor="ctr"/>
-          <a:lstStyle/>
-          <a:p>
-            <a:pPr indent="0" marL="0">
-              <a:lnSpc>
-                <a:spcPct val="130000"/>
-              </a:lnSpc>
-              <a:buNone/>
-            </a:pPr>
-            <a:r>
-              <a:rPr lang="en-US" sz="1600" dirty="0">
-                <a:solidFill>
-                  <a:srgbClr val="9FB3B6"/>
-                </a:solidFill>
-                <a:latin typeface="Calibri" pitchFamily="34" charset="0"/>
-                <a:ea typeface="Calibri" pitchFamily="34" charset="-122"/>
-                <a:cs typeface="Calibri" pitchFamily="34" charset="-120"/>
-              </a:rPr>
-              <a:t>Concept: FloodFact-AI-Concept.pdf  ·  Pilot Plan: FloodFact-AI-Pilot-Plan.pdf  ·  Repository: github.com/VinceOdundo/FloodfactAI</a:t>
-            </a:r>
-            <a:endParaRPr lang="en-US" sz="1600" dirty="0"/>
-          </a:p>
-        </p:txBody>
-      </p:sp>
-      <p:sp>
-        <p:nvSpPr>
-          <p:cNvPr id="5" name="Text 3"/>
-          <p:cNvSpPr/>
-          <p:nvPr/>
-        </p:nvSpPr>
-        <p:spPr>
-          <a:xfrm>
-            <a:off x="548640" y="6510528"/>
-            <a:ext cx="7315200" cy="274320"/>
-          </a:xfrm>
-          <a:prstGeom prst="rect">
-            <a:avLst/>
-          </a:prstGeom>
-          <a:noFill/>
-          <a:ln/>
-        </p:spPr>
-        <p:txBody>
-          <a:bodyPr wrap="square" lIns="0" tIns="0" rIns="0" bIns="0" rtlCol="0" anchor="ctr"/>
-          <a:lstStyle/>
-          <a:p>
-            <a:pPr indent="0" marL="0">
-              <a:buNone/>
-            </a:pPr>
-            <a:r>
-              <a:rPr lang="en-US" sz="900" dirty="0">
-                <a:solidFill>
-                  <a:srgbClr val="5A6E71"/>
-                </a:solidFill>
-                <a:latin typeface="Calibri" pitchFamily="34" charset="0"/>
-                <a:ea typeface="Calibri" pitchFamily="34" charset="-122"/>
-                <a:cs typeface="Calibri" pitchFamily="34" charset="-120"/>
-              </a:rPr>
-              <a:t>FloodFact AI  ·  Phase 1 Pilot: Mukuru, Nairobi</a:t>
-            </a:r>
-            <a:endParaRPr lang="en-US" sz="900" dirty="0"/>
-          </a:p>
-        </p:txBody>
-      </p:sp>
-      <p:sp>
-        <p:nvSpPr>
-          <p:cNvPr id="6" name="Text 4"/>
-          <p:cNvSpPr/>
-          <p:nvPr/>
-        </p:nvSpPr>
-        <p:spPr>
-          <a:xfrm>
-            <a:off x="11430000" y="6510528"/>
-            <a:ext cx="457200" cy="274320"/>
-          </a:xfrm>
-          <a:prstGeom prst="rect">
-            <a:avLst/>
-          </a:prstGeom>
-          <a:noFill/>
-          <a:ln/>
-        </p:spPr>
-        <p:txBody>
-          <a:bodyPr wrap="square" lIns="0" tIns="0" rIns="0" bIns="0" rtlCol="0" anchor="ctr"/>
-          <a:lstStyle/>
-          <a:p>
-            <a:pPr algn="r" indent="0" marL="0">
-              <a:buNone/>
-            </a:pPr>
-            <a:r>
-              <a:rPr lang="en-US" sz="900" dirty="0">
-                <a:solidFill>
-                  <a:srgbClr val="5A6E71"/>
-                </a:solidFill>
-                <a:latin typeface="Calibri" pitchFamily="34" charset="0"/>
-                <a:ea typeface="Calibri" pitchFamily="34" charset="-122"/>
-                <a:cs typeface="Calibri" pitchFamily="34" charset="-120"/>
-              </a:rPr>
-              <a:t>17</a:t>
+              <a:t>18</a:t>
             </a:r>
             <a:endParaRPr lang="en-US" sz="900" dirty="0"/>
           </a:p>
@@ -7417,6 +7904,259 @@
 </p:sld>
 </file>
 
+<file path=ppt/slides/slide20.xml><?xml version="1.0" encoding="utf-8"?>
+<p:sld xmlns:a="http://schemas.openxmlformats.org/drawingml/2006/main" xmlns:r="http://schemas.openxmlformats.org/officeDocument/2006/relationships" xmlns:p="http://schemas.openxmlformats.org/presentationml/2006/main">
+  <p:cSld name="Slide 20">
+    <p:bg>
+      <p:bgPr>
+        <a:solidFill>
+          <a:srgbClr val="0A0D10"/>
+        </a:solidFill>
+      </p:bgPr>
+    </p:bg>
+    <p:spTree>
+      <p:nvGrpSpPr>
+        <p:cNvPr id="1" name=""/>
+        <p:cNvGrpSpPr/>
+        <p:nvPr/>
+      </p:nvGrpSpPr>
+      <p:grpSpPr>
+        <a:xfrm>
+          <a:off x="0" y="0"/>
+          <a:ext cx="0" cy="0"/>
+          <a:chOff x="0" y="0"/>
+          <a:chExt cx="0" cy="0"/>
+        </a:xfrm>
+      </p:grpSpPr>
+      <p:sp>
+        <p:nvSpPr>
+          <p:cNvPr id="2" name="Text 0"/>
+          <p:cNvSpPr/>
+          <p:nvPr/>
+        </p:nvSpPr>
+        <p:spPr>
+          <a:xfrm>
+            <a:off x="822960" y="1463040"/>
+            <a:ext cx="9144000" cy="365760"/>
+          </a:xfrm>
+          <a:prstGeom prst="rect">
+            <a:avLst/>
+          </a:prstGeom>
+          <a:noFill/>
+          <a:ln/>
+        </p:spPr>
+        <p:txBody>
+          <a:bodyPr wrap="square" lIns="0" tIns="0" rIns="0" bIns="0" rtlCol="0" anchor="ctr"/>
+          <a:lstStyle/>
+          <a:p>
+            <a:pPr indent="0" marL="0">
+              <a:buNone/>
+            </a:pPr>
+            <a:r>
+              <a:rPr lang="en-US" sz="1300" b="1" spc="120" kern="0" dirty="0">
+                <a:solidFill>
+                  <a:srgbClr val="3FB8AE"/>
+                </a:solidFill>
+                <a:latin typeface="Calibri" pitchFamily="34" charset="0"/>
+                <a:ea typeface="Calibri" pitchFamily="34" charset="-122"/>
+                <a:cs typeface="Calibri" pitchFamily="34" charset="-120"/>
+              </a:rPr>
+              <a:t>THANK YOU</a:t>
+            </a:r>
+            <a:endParaRPr lang="en-US" sz="1300" dirty="0"/>
+          </a:p>
+        </p:txBody>
+      </p:sp>
+      <p:sp>
+        <p:nvSpPr>
+          <p:cNvPr id="3" name="Text 1"/>
+          <p:cNvSpPr/>
+          <p:nvPr/>
+        </p:nvSpPr>
+        <p:spPr>
+          <a:xfrm>
+            <a:off x="822960" y="1874520"/>
+            <a:ext cx="10332720" cy="2377440"/>
+          </a:xfrm>
+          <a:prstGeom prst="rect">
+            <a:avLst/>
+          </a:prstGeom>
+          <a:noFill/>
+          <a:ln/>
+        </p:spPr>
+        <p:txBody>
+          <a:bodyPr wrap="square" lIns="0" tIns="0" rIns="0" bIns="0" rtlCol="0" anchor="ctr"/>
+          <a:lstStyle/>
+          <a:p>
+            <a:pPr indent="0" marL="0">
+              <a:lnSpc>
+                <a:spcPct val="115000"/>
+              </a:lnSpc>
+              <a:buNone/>
+            </a:pPr>
+            <a:r>
+              <a:rPr lang="en-US" sz="3400" b="1" dirty="0">
+                <a:solidFill>
+                  <a:srgbClr val="FFFFFF"/>
+                </a:solidFill>
+                <a:latin typeface="Calibri" pitchFamily="34" charset="0"/>
+                <a:ea typeface="Calibri" pitchFamily="34" charset="-122"/>
+                <a:cs typeface="Calibri" pitchFamily="34" charset="-120"/>
+              </a:rPr>
+              <a:t>This is not a concept.</a:t>
+            </a:r>
+            <a:endParaRPr lang="en-US" sz="3400" dirty="0"/>
+          </a:p>
+          <a:p>
+            <a:pPr indent="0" marL="0">
+              <a:lnSpc>
+                <a:spcPct val="115000"/>
+              </a:lnSpc>
+              <a:buNone/>
+            </a:pPr>
+            <a:r>
+              <a:rPr lang="en-US" sz="3400" b="1" dirty="0">
+                <a:solidFill>
+                  <a:srgbClr val="FFFFFF"/>
+                </a:solidFill>
+                <a:latin typeface="Calibri" pitchFamily="34" charset="0"/>
+                <a:ea typeface="Calibri" pitchFamily="34" charset="-122"/>
+                <a:cs typeface="Calibri" pitchFamily="34" charset="-120"/>
+              </a:rPr>
+              <a:t>It's a working system, waiting on real credentials.</a:t>
+            </a:r>
+            <a:endParaRPr lang="en-US" sz="3400" dirty="0"/>
+          </a:p>
+        </p:txBody>
+      </p:sp>
+      <p:sp>
+        <p:nvSpPr>
+          <p:cNvPr id="4" name="Text 2"/>
+          <p:cNvSpPr/>
+          <p:nvPr/>
+        </p:nvSpPr>
+        <p:spPr>
+          <a:xfrm>
+            <a:off x="822960" y="4160520"/>
+            <a:ext cx="9601200" cy="914400"/>
+          </a:xfrm>
+          <a:prstGeom prst="rect">
+            <a:avLst/>
+          </a:prstGeom>
+          <a:noFill/>
+          <a:ln/>
+        </p:spPr>
+        <p:txBody>
+          <a:bodyPr wrap="square" lIns="0" tIns="0" rIns="0" bIns="0" rtlCol="0" anchor="ctr"/>
+          <a:lstStyle/>
+          <a:p>
+            <a:pPr indent="0" marL="0">
+              <a:lnSpc>
+                <a:spcPct val="130000"/>
+              </a:lnSpc>
+              <a:buNone/>
+            </a:pPr>
+            <a:r>
+              <a:rPr lang="en-US" sz="1600" dirty="0">
+                <a:solidFill>
+                  <a:srgbClr val="9FB3B6"/>
+                </a:solidFill>
+                <a:latin typeface="Calibri" pitchFamily="34" charset="0"/>
+                <a:ea typeface="Calibri" pitchFamily="34" charset="-122"/>
+                <a:cs typeface="Calibri" pitchFamily="34" charset="-120"/>
+              </a:rPr>
+              <a:t>Concept: FloodFact-AI-Concept.pdf  ·  Pilot Plan: FloodFact-AI-Pilot-Plan.pdf  ·  Repository: github.com/VinceOdundo/FloodfactAI</a:t>
+            </a:r>
+            <a:endParaRPr lang="en-US" sz="1600" dirty="0"/>
+          </a:p>
+        </p:txBody>
+      </p:sp>
+      <p:sp>
+        <p:nvSpPr>
+          <p:cNvPr id="5" name="Text 3"/>
+          <p:cNvSpPr/>
+          <p:nvPr/>
+        </p:nvSpPr>
+        <p:spPr>
+          <a:xfrm>
+            <a:off x="548640" y="6510528"/>
+            <a:ext cx="7315200" cy="274320"/>
+          </a:xfrm>
+          <a:prstGeom prst="rect">
+            <a:avLst/>
+          </a:prstGeom>
+          <a:noFill/>
+          <a:ln/>
+        </p:spPr>
+        <p:txBody>
+          <a:bodyPr wrap="square" lIns="0" tIns="0" rIns="0" bIns="0" rtlCol="0" anchor="ctr"/>
+          <a:lstStyle/>
+          <a:p>
+            <a:pPr indent="0" marL="0">
+              <a:buNone/>
+            </a:pPr>
+            <a:r>
+              <a:rPr lang="en-US" sz="900" dirty="0">
+                <a:solidFill>
+                  <a:srgbClr val="5A6E71"/>
+                </a:solidFill>
+                <a:latin typeface="Calibri" pitchFamily="34" charset="0"/>
+                <a:ea typeface="Calibri" pitchFamily="34" charset="-122"/>
+                <a:cs typeface="Calibri" pitchFamily="34" charset="-120"/>
+              </a:rPr>
+              <a:t>FloodFact AI  ·  Phase 1 Pilot: Mukuru, Nairobi</a:t>
+            </a:r>
+            <a:endParaRPr lang="en-US" sz="900" dirty="0"/>
+          </a:p>
+        </p:txBody>
+      </p:sp>
+      <p:sp>
+        <p:nvSpPr>
+          <p:cNvPr id="6" name="Text 4"/>
+          <p:cNvSpPr/>
+          <p:nvPr/>
+        </p:nvSpPr>
+        <p:spPr>
+          <a:xfrm>
+            <a:off x="11430000" y="6510528"/>
+            <a:ext cx="457200" cy="274320"/>
+          </a:xfrm>
+          <a:prstGeom prst="rect">
+            <a:avLst/>
+          </a:prstGeom>
+          <a:noFill/>
+          <a:ln/>
+        </p:spPr>
+        <p:txBody>
+          <a:bodyPr wrap="square" lIns="0" tIns="0" rIns="0" bIns="0" rtlCol="0" anchor="ctr"/>
+          <a:lstStyle/>
+          <a:p>
+            <a:pPr algn="r" indent="0" marL="0">
+              <a:buNone/>
+            </a:pPr>
+            <a:r>
+              <a:rPr lang="en-US" sz="900" dirty="0">
+                <a:solidFill>
+                  <a:srgbClr val="5A6E71"/>
+                </a:solidFill>
+                <a:latin typeface="Calibri" pitchFamily="34" charset="0"/>
+                <a:ea typeface="Calibri" pitchFamily="34" charset="-122"/>
+                <a:cs typeface="Calibri" pitchFamily="34" charset="-120"/>
+              </a:rPr>
+              <a:t>19</a:t>
+            </a:r>
+            <a:endParaRPr lang="en-US" sz="900" dirty="0"/>
+          </a:p>
+        </p:txBody>
+      </p:sp>
+    </p:spTree>
+  </p:cSld>
+  <p:clrMapOvr>
+    <a:masterClrMapping/>
+  </p:clrMapOvr>
+</p:sld>
+</file>
+
 <file path=ppt/slides/slide3.xml><?xml version="1.0" encoding="utf-8"?>
 <p:sld xmlns:a="http://schemas.openxmlformats.org/drawingml/2006/main" xmlns:r="http://schemas.openxmlformats.org/officeDocument/2006/relationships" xmlns:p="http://schemas.openxmlformats.org/presentationml/2006/main">
   <p:cSld name="Slide 3">
@@ -7811,12 +8551,12 @@
         </p:nvSpPr>
         <p:spPr>
           <a:xfrm>
-            <a:off x="4724682" y="1728216"/>
-            <a:ext cx="2739588" cy="4270248"/>
+            <a:off x="4834210" y="1728216"/>
+            <a:ext cx="2520532" cy="4270248"/>
           </a:xfrm>
           <a:prstGeom prst="roundRect">
             <a:avLst>
-              <a:gd name="adj" fmla="val 1669"/>
+              <a:gd name="adj" fmla="val 1814"/>
             </a:avLst>
           </a:prstGeom>
           <a:solidFill>
@@ -7846,8 +8586,8 @@
         </p:blipFill>
         <p:spPr>
           <a:xfrm>
-            <a:off x="4779546" y="1783080"/>
-            <a:ext cx="2629860" cy="4160520"/>
+            <a:off x="4889074" y="1783080"/>
+            <a:ext cx="2410804" cy="4160520"/>
           </a:xfrm>
           <a:prstGeom prst="rect">
             <a:avLst/>
@@ -8092,8 +8832,8 @@
         </p:nvSpPr>
         <p:spPr>
           <a:xfrm>
-            <a:off x="3268818" y="1728216"/>
-            <a:ext cx="5651316" cy="4270248"/>
+            <a:off x="3714081" y="1728216"/>
+            <a:ext cx="4760790" cy="4270248"/>
           </a:xfrm>
           <a:prstGeom prst="roundRect">
             <a:avLst>
@@ -8127,8 +8867,8 @@
         </p:blipFill>
         <p:spPr>
           <a:xfrm>
-            <a:off x="3323682" y="1783080"/>
-            <a:ext cx="5541588" cy="4160520"/>
+            <a:off x="3768945" y="1783080"/>
+            <a:ext cx="4651062" cy="4160520"/>
           </a:xfrm>
           <a:prstGeom prst="rect">
             <a:avLst/>
@@ -8373,8 +9113,8 @@
         </p:nvSpPr>
         <p:spPr>
           <a:xfrm>
-            <a:off x="2341372" y="1728216"/>
-            <a:ext cx="7506208" cy="4270248"/>
+            <a:off x="3067812" y="1728216"/>
+            <a:ext cx="6053328" cy="4270248"/>
           </a:xfrm>
           <a:prstGeom prst="roundRect">
             <a:avLst>
@@ -8408,8 +9148,8 @@
         </p:blipFill>
         <p:spPr>
           <a:xfrm>
-            <a:off x="2396236" y="1783080"/>
-            <a:ext cx="7396480" cy="4160520"/>
+            <a:off x="3122676" y="1783080"/>
+            <a:ext cx="5943600" cy="4160520"/>
           </a:xfrm>
           <a:prstGeom prst="rect">
             <a:avLst/>
@@ -9874,8 +10614,8 @@
         </p:nvSpPr>
         <p:spPr>
           <a:xfrm>
-            <a:off x="3239683" y="1728216"/>
-            <a:ext cx="5709587" cy="4270248"/>
+            <a:off x="3336330" y="1728216"/>
+            <a:ext cx="5516292" cy="4270248"/>
           </a:xfrm>
           <a:prstGeom prst="roundRect">
             <a:avLst>
@@ -9909,8 +10649,8 @@
         </p:blipFill>
         <p:spPr>
           <a:xfrm>
-            <a:off x="3294547" y="1783080"/>
-            <a:ext cx="5599859" cy="4160520"/>
+            <a:off x="3391194" y="1783080"/>
+            <a:ext cx="5406564" cy="4160520"/>
           </a:xfrm>
           <a:prstGeom prst="rect">
             <a:avLst/>
@@ -10155,8 +10895,8 @@
         </p:nvSpPr>
         <p:spPr>
           <a:xfrm>
-            <a:off x="2581517" y="1728216"/>
-            <a:ext cx="7025917" cy="4270248"/>
+            <a:off x="3248487" y="1728216"/>
+            <a:ext cx="5691977" cy="4270248"/>
           </a:xfrm>
           <a:prstGeom prst="roundRect">
             <a:avLst>
@@ -10190,8 +10930,8 @@
         </p:blipFill>
         <p:spPr>
           <a:xfrm>
-            <a:off x="2636381" y="1783080"/>
-            <a:ext cx="6916189" cy="4160520"/>
+            <a:off x="3303351" y="1783080"/>
+            <a:ext cx="5582249" cy="4160520"/>
           </a:xfrm>
           <a:prstGeom prst="rect">
             <a:avLst/>
